--- a/docs/test/stress/m3-challenger-output/a23_dark_stress.pptx
+++ b/docs/test/stress/m3-challenger-output/a23_dark_stress.pptx
@@ -1022,12 +1022,12 @@
         </p:nvSpPr>
         <p:spPr>
           <a:xfrm>
-            <a:off x="566928" y="1371600"/>
-            <a:ext cx="5120640" cy="3840480"/>
+            <a:off x="566928" y="1325880"/>
+            <a:ext cx="5120640" cy="3822192"/>
           </a:xfrm>
           <a:prstGeom prst="roundRect">
             <a:avLst>
-              <a:gd name="adj" fmla="val 1905"/>
+              <a:gd name="adj" fmla="val 1914"/>
             </a:avLst>
           </a:prstGeom>
           <a:solidFill>
@@ -1049,12 +1049,12 @@
         </p:nvSpPr>
         <p:spPr>
           <a:xfrm>
-            <a:off x="795528" y="1600200"/>
-            <a:ext cx="4663440" cy="1005840"/>
+            <a:off x="795528" y="1508760"/>
+            <a:ext cx="4663440" cy="566928"/>
           </a:xfrm>
           <a:prstGeom prst="roundRect">
             <a:avLst>
-              <a:gd name="adj" fmla="val 7273"/>
+              <a:gd name="adj" fmla="val 12903"/>
             </a:avLst>
           </a:prstGeom>
           <a:solidFill>
@@ -1071,24 +1071,26 @@
         </p:nvSpPr>
         <p:spPr>
           <a:xfrm>
-            <a:off x="1024128" y="1600200"/>
-            <a:ext cx="2286000" cy="1005840"/>
-          </a:xfrm>
-          <a:prstGeom prst="rect">
-            <a:avLst/>
-          </a:prstGeom>
-          <a:noFill/>
-          <a:ln/>
-        </p:spPr>
-        <p:txBody>
-          <a:bodyPr wrap="square" rtlCol="0" anchor="ctr"/>
+            <a:off x="978408" y="1581912"/>
+            <a:ext cx="2880360" cy="420624"/>
+          </a:xfrm>
+          <a:prstGeom prst="rect">
+            <a:avLst/>
+          </a:prstGeom>
+          <a:noFill/>
+          <a:ln/>
+        </p:spPr>
+        <p:txBody>
+          <a:bodyPr wrap="square" lIns="0" tIns="0" rIns="0" bIns="0" rtlCol="0" anchor="ctr">
+            <a:normAutofit/>
+          </a:bodyPr>
           <a:lstStyle/>
           <a:p>
             <a:pPr indent="0" marL="0">
               <a:buNone/>
             </a:pPr>
             <a:r>
-              <a:rPr lang="en-US" sz="1600" b="1" dirty="0">
+              <a:rPr lang="en-US" sz="1050" b="1" dirty="0">
                 <a:solidFill>
                   <a:srgbClr val="FFFFFF"/>
                 </a:solidFill>
@@ -1096,9 +1098,9 @@
                 <a:ea typeface="Pretendard" pitchFamily="34" charset="-122"/>
                 <a:cs typeface="Pretendard" pitchFamily="34" charset="-120"/>
               </a:rPr>
-              <a:t>수익률</a:t>
-            </a:r>
-            <a:endParaRPr lang="en-US" sz="1600" dirty="0"/>
+              <a:t>임대수익률 (Gross, 매매가−보증금 대비)</a:t>
+            </a:r>
+            <a:endParaRPr lang="en-US" sz="1050" dirty="0"/>
           </a:p>
         </p:txBody>
       </p:sp>
@@ -1110,24 +1112,24 @@
         </p:nvSpPr>
         <p:spPr>
           <a:xfrm>
-            <a:off x="2487168" y="1600200"/>
-            <a:ext cx="2743200" cy="1005840"/>
-          </a:xfrm>
-          <a:prstGeom prst="rect">
-            <a:avLst/>
-          </a:prstGeom>
-          <a:noFill/>
-          <a:ln/>
-        </p:spPr>
-        <p:txBody>
-          <a:bodyPr wrap="square" rtlCol="0" anchor="ctr"/>
+            <a:off x="3904488" y="1581912"/>
+            <a:ext cx="1417320" cy="420624"/>
+          </a:xfrm>
+          <a:prstGeom prst="rect">
+            <a:avLst/>
+          </a:prstGeom>
+          <a:noFill/>
+          <a:ln/>
+        </p:spPr>
+        <p:txBody>
+          <a:bodyPr wrap="square" lIns="0" tIns="0" rIns="0" bIns="0" rtlCol="0" anchor="ctr"/>
           <a:lstStyle/>
           <a:p>
             <a:pPr algn="r" indent="0" marL="0">
               <a:buNone/>
             </a:pPr>
             <a:r>
-              <a:rPr lang="en-US" sz="2800" b="1" dirty="0">
+              <a:rPr lang="en-US" sz="2400" b="1" dirty="0">
                 <a:solidFill>
                   <a:srgbClr val="B98A2E"/>
                 </a:solidFill>
@@ -1137,7 +1139,7 @@
               </a:rPr>
               <a:t>0.00%</a:t>
             </a:r>
-            <a:endParaRPr lang="en-US" sz="2800" dirty="0"/>
+            <a:endParaRPr lang="en-US" sz="2400" dirty="0"/>
           </a:p>
         </p:txBody>
       </p:sp>
@@ -1149,7 +1151,7 @@
         </p:nvSpPr>
         <p:spPr>
           <a:xfrm>
-            <a:off x="886968" y="2834640"/>
+            <a:off x="886968" y="2185416"/>
             <a:ext cx="2743200" cy="347472"/>
           </a:xfrm>
           <a:prstGeom prst="rect">
@@ -1188,7 +1190,7 @@
         </p:nvSpPr>
         <p:spPr>
           <a:xfrm>
-            <a:off x="3127248" y="2834640"/>
+            <a:off x="3127248" y="2185416"/>
             <a:ext cx="2194560" cy="347472"/>
           </a:xfrm>
           <a:prstGeom prst="rect">
@@ -1227,7 +1229,7 @@
         </p:nvSpPr>
         <p:spPr>
           <a:xfrm>
-            <a:off x="795528" y="3182112"/>
+            <a:off x="795528" y="2532888"/>
             <a:ext cx="4663440" cy="0"/>
           </a:xfrm>
           <a:prstGeom prst="line">
@@ -1250,7 +1252,7 @@
         </p:nvSpPr>
         <p:spPr>
           <a:xfrm>
-            <a:off x="886968" y="3182112"/>
+            <a:off x="886968" y="2532888"/>
             <a:ext cx="2743200" cy="347472"/>
           </a:xfrm>
           <a:prstGeom prst="rect">
@@ -1289,7 +1291,7 @@
         </p:nvSpPr>
         <p:spPr>
           <a:xfrm>
-            <a:off x="3127248" y="3182112"/>
+            <a:off x="3127248" y="2532888"/>
             <a:ext cx="2194560" cy="347472"/>
           </a:xfrm>
           <a:prstGeom prst="rect">
@@ -1328,7 +1330,7 @@
         </p:nvSpPr>
         <p:spPr>
           <a:xfrm>
-            <a:off x="795528" y="3529584"/>
+            <a:off x="795528" y="2880360"/>
             <a:ext cx="4663440" cy="0"/>
           </a:xfrm>
           <a:prstGeom prst="line">
@@ -1351,7 +1353,7 @@
         </p:nvSpPr>
         <p:spPr>
           <a:xfrm>
-            <a:off x="886968" y="3529584"/>
+            <a:off x="886968" y="2880360"/>
             <a:ext cx="2743200" cy="347472"/>
           </a:xfrm>
           <a:prstGeom prst="rect">
@@ -1390,7 +1392,7 @@
         </p:nvSpPr>
         <p:spPr>
           <a:xfrm>
-            <a:off x="3127248" y="3529584"/>
+            <a:off x="3127248" y="2880360"/>
             <a:ext cx="2194560" cy="347472"/>
           </a:xfrm>
           <a:prstGeom prst="rect">
@@ -1429,7 +1431,7 @@
         </p:nvSpPr>
         <p:spPr>
           <a:xfrm>
-            <a:off x="795528" y="3877056"/>
+            <a:off x="795528" y="3227832"/>
             <a:ext cx="4663440" cy="0"/>
           </a:xfrm>
           <a:prstGeom prst="line">
@@ -1452,7 +1454,7 @@
         </p:nvSpPr>
         <p:spPr>
           <a:xfrm>
-            <a:off x="886968" y="3877056"/>
+            <a:off x="886968" y="3227832"/>
             <a:ext cx="2743200" cy="347472"/>
           </a:xfrm>
           <a:prstGeom prst="rect">
@@ -1477,7 +1479,7 @@
                 <a:ea typeface="Pretendard" pitchFamily="34" charset="-122"/>
                 <a:cs typeface="Pretendard" pitchFamily="34" charset="-120"/>
               </a:rPr>
-              <a:t>순투자금 (매매가 − 보증금)</a:t>
+              <a:t>보증금 차감 매입가 (매매가−보증금)</a:t>
             </a:r>
             <a:endParaRPr lang="en-US" sz="1100" dirty="0"/>
           </a:p>
@@ -1491,7 +1493,7 @@
         </p:nvSpPr>
         <p:spPr>
           <a:xfrm>
-            <a:off x="3127248" y="3877056"/>
+            <a:off x="3127248" y="3227832"/>
             <a:ext cx="2194560" cy="347472"/>
           </a:xfrm>
           <a:prstGeom prst="rect">
@@ -1530,7 +1532,7 @@
         </p:nvSpPr>
         <p:spPr>
           <a:xfrm>
-            <a:off x="795528" y="4224528"/>
+            <a:off x="795528" y="3575304"/>
             <a:ext cx="4663440" cy="0"/>
           </a:xfrm>
           <a:prstGeom prst="line">
@@ -1553,7 +1555,7 @@
         </p:nvSpPr>
         <p:spPr>
           <a:xfrm>
-            <a:off x="886968" y="4224528"/>
+            <a:off x="886968" y="3575304"/>
             <a:ext cx="2743200" cy="347472"/>
           </a:xfrm>
           <a:prstGeom prst="rect">
@@ -1592,7 +1594,7 @@
         </p:nvSpPr>
         <p:spPr>
           <a:xfrm>
-            <a:off x="3127248" y="4224528"/>
+            <a:off x="3127248" y="3575304"/>
             <a:ext cx="2194560" cy="347472"/>
           </a:xfrm>
           <a:prstGeom prst="rect">
@@ -1631,7 +1633,7 @@
         </p:nvSpPr>
         <p:spPr>
           <a:xfrm>
-            <a:off x="795528" y="4572000"/>
+            <a:off x="795528" y="3922776"/>
             <a:ext cx="4663440" cy="0"/>
           </a:xfrm>
           <a:prstGeom prst="line">
@@ -1654,7 +1656,7 @@
         </p:nvSpPr>
         <p:spPr>
           <a:xfrm>
-            <a:off x="886968" y="4572000"/>
+            <a:off x="886968" y="3922776"/>
             <a:ext cx="2743200" cy="347472"/>
           </a:xfrm>
           <a:prstGeom prst="rect">
@@ -1693,7 +1695,7 @@
         </p:nvSpPr>
         <p:spPr>
           <a:xfrm>
-            <a:off x="3127248" y="4572000"/>
+            <a:off x="3127248" y="3922776"/>
             <a:ext cx="2194560" cy="347472"/>
           </a:xfrm>
           <a:prstGeom prst="rect">
@@ -1732,7 +1734,7 @@
         </p:nvSpPr>
         <p:spPr>
           <a:xfrm>
-            <a:off x="795528" y="4919472"/>
+            <a:off x="795528" y="4270248"/>
             <a:ext cx="4663440" cy="0"/>
           </a:xfrm>
           <a:prstGeom prst="line">
@@ -1755,12 +1757,12 @@
         </p:nvSpPr>
         <p:spPr>
           <a:xfrm>
-            <a:off x="6053328" y="1371600"/>
-            <a:ext cx="5571439" cy="3840480"/>
+            <a:off x="6053328" y="1325880"/>
+            <a:ext cx="5571439" cy="3822192"/>
           </a:xfrm>
           <a:prstGeom prst="roundRect">
             <a:avLst>
-              <a:gd name="adj" fmla="val 1905"/>
+              <a:gd name="adj" fmla="val 1914"/>
             </a:avLst>
           </a:prstGeom>
           <a:solidFill>
@@ -1782,7 +1784,7 @@
         </p:nvSpPr>
         <p:spPr>
           <a:xfrm>
-            <a:off x="6236208" y="1508760"/>
+            <a:off x="6236208" y="1463040"/>
             <a:ext cx="5205679" cy="320040"/>
           </a:xfrm>
           <a:prstGeom prst="rect">
@@ -1821,7 +1823,7 @@
         </p:nvSpPr>
         <p:spPr>
           <a:xfrm>
-            <a:off x="6190488" y="1920240"/>
+            <a:off x="6190488" y="1874520"/>
             <a:ext cx="502920" cy="292608"/>
           </a:xfrm>
           <a:prstGeom prst="rect">
@@ -1860,7 +1862,7 @@
         </p:nvSpPr>
         <p:spPr>
           <a:xfrm>
-            <a:off x="6784848" y="1956816"/>
+            <a:off x="6784848" y="1911096"/>
             <a:ext cx="2373173" cy="219456"/>
           </a:xfrm>
           <a:prstGeom prst="rect">
@@ -1880,7 +1882,7 @@
         </p:nvSpPr>
         <p:spPr>
           <a:xfrm>
-            <a:off x="9203741" y="1920240"/>
+            <a:off x="9203741" y="1874520"/>
             <a:ext cx="1097280" cy="292608"/>
           </a:xfrm>
           <a:prstGeom prst="rect">
@@ -1919,7 +1921,7 @@
         </p:nvSpPr>
         <p:spPr>
           <a:xfrm>
-            <a:off x="6190488" y="2212848"/>
+            <a:off x="6190488" y="2167128"/>
             <a:ext cx="502920" cy="292608"/>
           </a:xfrm>
           <a:prstGeom prst="rect">
@@ -1958,7 +1960,7 @@
         </p:nvSpPr>
         <p:spPr>
           <a:xfrm>
-            <a:off x="6784848" y="2249424"/>
+            <a:off x="6784848" y="2203704"/>
             <a:ext cx="2689596" cy="219456"/>
           </a:xfrm>
           <a:prstGeom prst="rect">
@@ -1978,7 +1980,7 @@
         </p:nvSpPr>
         <p:spPr>
           <a:xfrm>
-            <a:off x="9520164" y="2212848"/>
+            <a:off x="9520164" y="2167128"/>
             <a:ext cx="1097280" cy="292608"/>
           </a:xfrm>
           <a:prstGeom prst="rect">
@@ -2017,7 +2019,7 @@
         </p:nvSpPr>
         <p:spPr>
           <a:xfrm>
-            <a:off x="6190488" y="2505456"/>
+            <a:off x="6190488" y="2459736"/>
             <a:ext cx="502920" cy="292608"/>
           </a:xfrm>
           <a:prstGeom prst="rect">
@@ -2056,7 +2058,7 @@
         </p:nvSpPr>
         <p:spPr>
           <a:xfrm>
-            <a:off x="6784848" y="2542032"/>
+            <a:off x="6784848" y="2496312"/>
             <a:ext cx="2966466" cy="219456"/>
           </a:xfrm>
           <a:prstGeom prst="rect">
@@ -2076,7 +2078,7 @@
         </p:nvSpPr>
         <p:spPr>
           <a:xfrm>
-            <a:off x="9797034" y="2505456"/>
+            <a:off x="9797034" y="2459736"/>
             <a:ext cx="1097280" cy="292608"/>
           </a:xfrm>
           <a:prstGeom prst="rect">
@@ -2115,7 +2117,7 @@
         </p:nvSpPr>
         <p:spPr>
           <a:xfrm>
-            <a:off x="6190488" y="2798064"/>
+            <a:off x="6190488" y="2752344"/>
             <a:ext cx="502920" cy="292608"/>
           </a:xfrm>
           <a:prstGeom prst="rect">
@@ -2154,7 +2156,7 @@
         </p:nvSpPr>
         <p:spPr>
           <a:xfrm>
-            <a:off x="6784848" y="2834640"/>
+            <a:off x="6784848" y="2788920"/>
             <a:ext cx="3243336" cy="219456"/>
           </a:xfrm>
           <a:prstGeom prst="rect">
@@ -2174,7 +2176,7 @@
         </p:nvSpPr>
         <p:spPr>
           <a:xfrm>
-            <a:off x="10073904" y="2798064"/>
+            <a:off x="10073904" y="2752344"/>
             <a:ext cx="1097280" cy="292608"/>
           </a:xfrm>
           <a:prstGeom prst="rect">
@@ -2213,7 +2215,7 @@
         </p:nvSpPr>
         <p:spPr>
           <a:xfrm>
-            <a:off x="6190488" y="3090672"/>
+            <a:off x="6190488" y="3044952"/>
             <a:ext cx="502920" cy="292608"/>
           </a:xfrm>
           <a:prstGeom prst="rect">
@@ -2252,7 +2254,7 @@
         </p:nvSpPr>
         <p:spPr>
           <a:xfrm>
-            <a:off x="6784848" y="3127248"/>
+            <a:off x="6784848" y="3081528"/>
             <a:ext cx="3559759" cy="219456"/>
           </a:xfrm>
           <a:prstGeom prst="rect">
@@ -2272,7 +2274,7 @@
         </p:nvSpPr>
         <p:spPr>
           <a:xfrm>
-            <a:off x="10390327" y="3090672"/>
+            <a:off x="10390327" y="3044952"/>
             <a:ext cx="1097280" cy="292608"/>
           </a:xfrm>
           <a:prstGeom prst="rect">
@@ -2311,7 +2313,7 @@
         </p:nvSpPr>
         <p:spPr>
           <a:xfrm>
-            <a:off x="6236208" y="3520440"/>
+            <a:off x="6236208" y="3474720"/>
             <a:ext cx="5205679" cy="320040"/>
           </a:xfrm>
           <a:prstGeom prst="rect">
@@ -2364,7 +2366,7 @@
         </p:nvSpPr>
         <p:spPr>
           <a:xfrm>
-            <a:off x="6236208" y="3840480"/>
+            <a:off x="6236208" y="3794760"/>
             <a:ext cx="5205679" cy="274320"/>
           </a:xfrm>
           <a:prstGeom prst="rect">
@@ -2417,7 +2419,7 @@
         </p:nvSpPr>
         <p:spPr>
           <a:xfrm>
-            <a:off x="6190488" y="4892040"/>
+            <a:off x="6190488" y="4828032"/>
             <a:ext cx="5297119" cy="228600"/>
           </a:xfrm>
           <a:prstGeom prst="rect">
@@ -2456,12 +2458,12 @@
         </p:nvSpPr>
         <p:spPr>
           <a:xfrm>
-            <a:off x="566928" y="5349240"/>
-            <a:ext cx="11057839" cy="694944"/>
+            <a:off x="566928" y="5285232"/>
+            <a:ext cx="11057839" cy="612648"/>
           </a:xfrm>
           <a:prstGeom prst="roundRect">
             <a:avLst>
-              <a:gd name="adj" fmla="val 7895"/>
+              <a:gd name="adj" fmla="val 8955"/>
             </a:avLst>
           </a:prstGeom>
           <a:solidFill>
@@ -2478,8 +2480,8 @@
         </p:nvSpPr>
         <p:spPr>
           <a:xfrm>
-            <a:off x="566928" y="5404104"/>
-            <a:ext cx="36576" cy="585216"/>
+            <a:off x="566928" y="5340096"/>
+            <a:ext cx="36576" cy="502920"/>
           </a:xfrm>
           <a:prstGeom prst="rect">
             <a:avLst/>
@@ -2498,7 +2500,7 @@
         </p:nvSpPr>
         <p:spPr>
           <a:xfrm>
-            <a:off x="713232" y="5440680"/>
+            <a:off x="713232" y="5376672"/>
             <a:ext cx="10801807" cy="201168"/>
           </a:xfrm>
           <a:prstGeom prst="rect">
@@ -2523,7 +2525,7 @@
                 <a:ea typeface="Pretendard" pitchFamily="34" charset="-122"/>
                 <a:cs typeface="Pretendard" pitchFamily="34" charset="-120"/>
               </a:rPr>
-              <a:t>투자 판단 참고</a:t>
+              <a:t>수익률 산출 요약</a:t>
             </a:r>
             <a:endParaRPr lang="en-US" sz="1050" dirty="0"/>
           </a:p>
@@ -2537,8 +2539,8 @@
         </p:nvSpPr>
         <p:spPr>
           <a:xfrm>
-            <a:off x="713232" y="5641848"/>
-            <a:ext cx="10801807" cy="365760"/>
+            <a:off x="713232" y="5577840"/>
+            <a:ext cx="10801807" cy="283464"/>
           </a:xfrm>
           <a:prstGeom prst="rect">
             <a:avLst/>
@@ -2566,39 +2568,56 @@
                 <a:ea typeface="Pretendard" pitchFamily="34" charset="-122"/>
                 <a:cs typeface="Pretendard" pitchFamily="34" charset="-120"/>
               </a:rPr>
-              <a:t>5년간 공시지가 연평균 10.6% 상승 → 토지가치 보존력 확인</a:t>
+              <a:t>5년간 개별공시지가 연평균 10.6% 상승, 매매가 대비 토지 가치 비중 105.0% (공시지가×대지면적 기준)</a:t>
             </a:r>
             <a:endParaRPr lang="en-US" sz="980" dirty="0"/>
           </a:p>
-          <a:p>
-            <a:pPr marL="342900" indent="-342900">
-              <a:lnSpc>
-                <a:spcPct val="108000"/>
-              </a:lnSpc>
-              <a:spcBef>
-                <a:spcPts val="300"/>
-              </a:spcBef>
-              <a:buSzPct val="100000"/>
-              <a:buChar char="•"/>
-            </a:pPr>
-            <a:r>
-              <a:rPr lang="en-US" sz="980" dirty="0">
-                <a:solidFill>
-                  <a:srgbClr val="10161F"/>
+        </p:txBody>
+      </p:sp>
+      <p:sp>
+        <p:nvSpPr>
+          <p:cNvPr id="52" name="Text 50"/>
+          <p:cNvSpPr/>
+          <p:nvPr/>
+        </p:nvSpPr>
+        <p:spPr>
+          <a:xfrm>
+            <a:off x="566928" y="5952744"/>
+            <a:ext cx="11057839" cy="219456"/>
+          </a:xfrm>
+          <a:prstGeom prst="rect">
+            <a:avLst/>
+          </a:prstGeom>
+          <a:noFill/>
+          <a:ln/>
+        </p:spPr>
+        <p:txBody>
+          <a:bodyPr wrap="square" lIns="0" tIns="0" rIns="0" bIns="0" rtlCol="0" anchor="ctr">
+            <a:normAutofit/>
+          </a:bodyPr>
+          <a:lstStyle/>
+          <a:p>
+            <a:pPr indent="0" marL="0">
+              <a:buNone/>
+            </a:pPr>
+            <a:r>
+              <a:rPr lang="en-US" sz="800" dirty="0">
+                <a:solidFill>
+                  <a:srgbClr val="8A8A8A"/>
                 </a:solidFill>
                 <a:latin typeface="Pretendard" pitchFamily="34" charset="0"/>
                 <a:ea typeface="Pretendard" pitchFamily="34" charset="-122"/>
                 <a:cs typeface="Pretendard" pitchFamily="34" charset="-120"/>
               </a:rPr>
-              <a:t>매매가 대비 토지비중 105% → 감가 리스크 낮은 토지 중심 자산</a:t>
-            </a:r>
-            <a:endParaRPr lang="en-US" sz="980" dirty="0"/>
-          </a:p>
-        </p:txBody>
-      </p:sp>
-      <p:sp>
-        <p:nvSpPr>
-          <p:cNvPr id="52" name="Text 50"/>
+              <a:t>※ 임대수익률은 운영비 차감 전 기준, 보증금 승계 가정.</a:t>
+            </a:r>
+            <a:endParaRPr lang="en-US" sz="800" dirty="0"/>
+          </a:p>
+        </p:txBody>
+      </p:sp>
+      <p:sp>
+        <p:nvSpPr>
+          <p:cNvPr id="53" name="Text 51"/>
           <p:cNvSpPr/>
           <p:nvPr/>
         </p:nvSpPr>
@@ -2637,7 +2656,7 @@
       </p:sp>
       <p:sp>
         <p:nvSpPr>
-          <p:cNvPr id="53" name="Text 51"/>
+          <p:cNvPr id="54" name="Text 52"/>
           <p:cNvSpPr/>
           <p:nvPr/>
         </p:nvSpPr>
